--- a/assets/pptx/catalog-542.pptx
+++ b/assets/pptx/catalog-542.pptx
@@ -3301,7 +3301,7 @@
                 <a:ea typeface="Ebrima"/>
                 <a:cs typeface="Ebrima"/>
               </a:rPr>
-              <a:t>አምናለሁ ካንተ ዘንድ ምላሽ አገኛለሁ (2x)</a:t>
+              <a:t>አምናለሁ ካንተ ዘንድ ምላሽ አገኛለሁ 2x</a:t>
             </a:r>
           </a:p>
         </p:txBody>
@@ -3404,7 +3404,7 @@
                 <a:ea typeface="Ebrima"/>
                 <a:cs typeface="Ebrima"/>
               </a:rPr>
-              <a:t>የመድኃኒቴ አምላክ ተስፋ አረግሃለሁ (2x)</a:t>
+              <a:t>የመድኃኒቴ አምላክ ተስፋ አረግሃለሁ 2x</a:t>
             </a:r>
           </a:p>
         </p:txBody>
@@ -3525,7 +3525,7 @@
                 <a:ea typeface="Ebrima"/>
                 <a:cs typeface="Ebrima"/>
               </a:rPr>
-              <a:t>ሁሉ ይቻልሃል ምንም አይከብድህም (2x)</a:t>
+              <a:t>ሁሉ ይቻልሃል ምንም አይከብድህም 2x</a:t>
             </a:r>
           </a:p>
         </p:txBody>
@@ -3628,7 +3628,7 @@
                 <a:ea typeface="Ebrima"/>
                 <a:cs typeface="Ebrima"/>
               </a:rPr>
-              <a:t>የመድኃኒቴ አምላክ ተስፋ አረግሃለሁ (2x)</a:t>
+              <a:t>የመድኃኒቴ አምላክ ተስፋ አረግሃለሁ 2x</a:t>
             </a:r>
           </a:p>
         </p:txBody>
@@ -3749,7 +3749,7 @@
                 <a:ea typeface="Ebrima"/>
                 <a:cs typeface="Ebrima"/>
               </a:rPr>
-              <a:t>መድኃኒቴ አንተ ነህ ትፈውሰኛለህ (2x)</a:t>
+              <a:t>መድኃኒቴ አንተ ነህ ትፈውሰኛለህ 2x</a:t>
             </a:r>
           </a:p>
         </p:txBody>
@@ -3852,7 +3852,7 @@
                 <a:ea typeface="Ebrima"/>
                 <a:cs typeface="Ebrima"/>
               </a:rPr>
-              <a:t>የመድኃኒቴ አምላክ ተስፋ አረግሃለሁ (2x)</a:t>
+              <a:t>የመድኃኒቴ አምላክ ተስፋ አረግሃለሁ 2x</a:t>
             </a:r>
           </a:p>
         </p:txBody>
@@ -3919,7 +3919,7 @@
                 <a:ea typeface="Ebrima"/>
                 <a:cs typeface="Ebrima"/>
               </a:rPr>
-              <a:t>የመድኃኒቴ አምላክ ተስፋ አረግሃለሁ (3x)</a:t>
+              <a:t>የመድኃኒቴ አምላክ ተስፋ አረግሃለሁ 3x</a:t>
             </a:r>
           </a:p>
         </p:txBody>
